--- a/Modul Minna 1/Bab 18/43. Minna 1 Tata Bahasa Bab 18 - Slide.pptx
+++ b/Modul Minna 1/Bab 18/43. Minna 1 Tata Bahasa Bab 18 - Slide.pptx
@@ -4653,7 +4653,7 @@
                 <a:ea typeface="Arial" pitchFamily="34" charset="-122"/>
                 <a:cs typeface="Arial" pitchFamily="34" charset="-120"/>
               </a:rPr>
-              <a:t>なかなかふじさんをみることができません。</a:t>
+              <a:t>なかなかブロモさんをみることができません。</a:t>
             </a:r>
             <a:endParaRPr lang="en-US" sz="1700" dirty="0"/>
           </a:p>
@@ -4692,7 +4692,7 @@
                 <a:ea typeface="Arial" pitchFamily="34" charset="-122"/>
                 <a:cs typeface="Arial" pitchFamily="34" charset="-120"/>
               </a:rPr>
-              <a:t>nakanaka Fujisan o miru koto ga dekimasen</a:t>
+              <a:t>nakanaka Buromo-san o miru koto ga dekimasen</a:t>
             </a:r>
             <a:pPr indent="0" marL="0">
               <a:buNone/>
@@ -4720,7 +4720,7 @@
                 <a:ea typeface="Arial" pitchFamily="34" charset="-122"/>
                 <a:cs typeface="Arial" pitchFamily="34" charset="-120"/>
               </a:rPr>
-              <a:t>Sulit sekali bisa melihat Gunung Fuji.</a:t>
+              <a:t>Sulit sekali bisa melihat Gunung Bromo.</a:t>
             </a:r>
             <a:endParaRPr lang="en-US" sz="950" dirty="0"/>
           </a:p>
@@ -5191,7 +5191,7 @@
                 <a:ea typeface="Arial" pitchFamily="34" charset="-122"/>
                 <a:cs typeface="Arial" pitchFamily="34" charset="-120"/>
               </a:rPr>
-              <a:t>ぜひほっかいどうへいきたいです。</a:t>
+              <a:t>ぜひロンボクへいきたいです。</a:t>
             </a:r>
             <a:endParaRPr lang="en-US" sz="1700" dirty="0"/>
           </a:p>
@@ -5230,7 +5230,7 @@
                 <a:ea typeface="Arial" pitchFamily="34" charset="-122"/>
                 <a:cs typeface="Arial" pitchFamily="34" charset="-120"/>
               </a:rPr>
-              <a:t>zehi Hokkaidou e ikitai desu</a:t>
+              <a:t>zehi Ronbok e ikitai desu</a:t>
             </a:r>
             <a:pPr indent="0" marL="0">
               <a:buNone/>
@@ -5258,7 +5258,7 @@
                 <a:ea typeface="Arial" pitchFamily="34" charset="-122"/>
                 <a:cs typeface="Arial" pitchFamily="34" charset="-120"/>
               </a:rPr>
-              <a:t>Saya benar-benar ingin ke Hokkaido.</a:t>
+              <a:t>Saya benar-benar ingin ke Lombok.</a:t>
             </a:r>
             <a:endParaRPr lang="en-US" sz="950" dirty="0"/>
           </a:p>
